--- a/public/downloads/US-114051-L4-Post-Meeting-Follow-Up.pptx
+++ b/public/downloads/US-114051-L4-Post-Meeting-Follow-Up.pptx
@@ -1921,7 +1921,7 @@
                 <a:ea typeface="Aptos" pitchFamily="34" charset="-122"/>
                 <a:cs typeface="Aptos" pitchFamily="34" charset="-120"/>
               </a:rPr>
-              <a:t>Accurate minutes in line with organisational policy, decisions communicated on time — and an implementation stage that actually delivers</a:t>
+              <a:t>Accurate minutes in line with company policy, decisions communicated on time — and an implementation stage that actually delivers</a:t>
             </a:r>
             <a:endParaRPr lang="en-US" sz="1900" dirty="0"/>
           </a:p>
@@ -2136,7 +2136,7 @@
                 <a:ea typeface="Aptos" pitchFamily="34" charset="-122"/>
                 <a:cs typeface="Aptos" pitchFamily="34" charset="-120"/>
               </a:rPr>
-              <a:t>Friday, 11 Sep 2026 · 09h00 – 14h00</a:t>
+              <a:t>Friday, 4 Sep 2026 · 09h00 – 14h00</a:t>
             </a:r>
             <a:endParaRPr lang="en-US" sz="1800" dirty="0"/>
           </a:p>
@@ -3687,7 +3687,7 @@
                 <a:ea typeface="Aptos" pitchFamily="34" charset="-122"/>
                 <a:cs typeface="Aptos" pitchFamily="34" charset="-120"/>
               </a:rPr>
-              <a:t>Minutes are produced accurately and in line with the policy of the organisation.</a:t>
+              <a:t>Minutes are produced accurately and in line with the policy of the company.</a:t>
             </a:r>
             <a:endParaRPr lang="en-US" sz="1800" dirty="0"/>
           </a:p>
@@ -3835,7 +3835,7 @@
                 <a:ea typeface="Aptos" pitchFamily="34" charset="-122"/>
                 <a:cs typeface="Aptos" pitchFamily="34" charset="-120"/>
               </a:rPr>
-              <a:t>Agreed records of discussion reach interested parties in the format and time frame the meeting type and organisation require.</a:t>
+              <a:t>Agreed records of discussion reach interested parties in the format and time frame the meeting type and company require.</a:t>
             </a:r>
             <a:endParaRPr lang="en-US" sz="1800" dirty="0"/>
           </a:p>
@@ -8557,7 +8557,7 @@
                 <a:ea typeface="Aptos" pitchFamily="34" charset="-122"/>
                 <a:cs typeface="Aptos" pitchFamily="34" charset="-120"/>
               </a:rPr>
-              <a:t>Organisational memory: potentially valuable information is captured and can be consulted at any time, helping avoid recurrent mistakes.</a:t>
+              <a:t>Company memory: potentially valuable information is captured and can be consulted at any time, helping avoid recurrent mistakes.</a:t>
             </a:r>
             <a:endParaRPr lang="en-US" sz="1800" dirty="0"/>
           </a:p>
